--- a/docs/demo/Документы/Презентация.pptx
+++ b/docs/demo/Документы/Презентация.pptx
@@ -202,7 +202,7 @@
                   <a:srgbClr val="2B2521"/>
                 </a:solidFill>
               </a:rPr>
-              <a:t>Документы, таблицы, презентации, PDF, текст, код, архивы, фото, видео и музыка.</a:t>
+              <a:t>Документы, таблицы, презентации, PDF, текст, код, архивы и фото.</a:t>
             </a:r>
           </a:p>
         </p:txBody>
